--- a/courses/build/mentor-3day/M-D3.zu.pptx
+++ b/courses/build/mentor-3day/M-D3.zu.pptx
@@ -763,7 +763,7 @@
           </a:p>
           <a:p>
             <a:r>
-              <a:t>Clip M-ANI-05: public/course-animations/market-community/watch-04-farm-record.mp4</a:t>
+              <a:t>Clip M-ANI-05: public/course-media/mentor-3day/M-ANI-05.mp4</a:t>
             </a:r>
           </a:p>
         </p:txBody>
@@ -1608,7 +1608,7 @@
           </a:p>
           <a:p>
             <a:r>
-              <a:t>Clip M-ANI-04: public/course-animations/market-community/watch-14-community-network.mp4</a:t>
+              <a:t>Clip M-ANI-04: public/course-media/mentor-3day/M-ANI-04.mp4</a:t>
             </a:r>
           </a:p>
         </p:txBody>
